--- a/content/W00/D4/slides/C2_W00_D04_framing_STUDENT.pptx
+++ b/content/W00/D4/slides/C2_W00_D04_framing_STUDENT.pptx
@@ -3489,14 +3489,14 @@
       </p:sp>
       <p:pic>
         <p:nvPicPr>
-          <p:cNvPr id="6" name="Picture 5" descr="eea323bc0d19e9f1.png"/>
+          <p:cNvPr id="6" name="Picture 5" descr="a2f2d12bc81e391f.png"/>
           <p:cNvPicPr>
             <a:picLocks noChangeAspect="1"/>
           </p:cNvPicPr>
           <p:nvPr/>
         </p:nvPicPr>
         <p:blipFill>
-          <a:blip r:embed="rId2"/>
+          <a:blip r:embed="rId3"/>
           <a:stretch>
             <a:fillRect/>
           </a:stretch>
@@ -6508,14 +6508,14 @@
       </p:sp>
       <p:pic>
         <p:nvPicPr>
-          <p:cNvPr id="6" name="Picture 5" descr="dd392b1795a730f1.png"/>
+          <p:cNvPr id="6" name="Picture 5" descr="82b7eae345eddf17.png"/>
           <p:cNvPicPr>
             <a:picLocks noChangeAspect="1"/>
           </p:cNvPicPr>
           <p:nvPr/>
         </p:nvPicPr>
         <p:blipFill>
-          <a:blip r:embed="rId2"/>
+          <a:blip r:embed="rId3"/>
           <a:stretch>
             <a:fillRect/>
           </a:stretch>
@@ -7666,14 +7666,14 @@
       </p:sp>
       <p:pic>
         <p:nvPicPr>
-          <p:cNvPr id="6" name="Picture 5" descr="f1981c11a5f03fed.png"/>
+          <p:cNvPr id="6" name="Picture 5" descr="40e00ebc0e020d33.png"/>
           <p:cNvPicPr>
             <a:picLocks noChangeAspect="1"/>
           </p:cNvPicPr>
           <p:nvPr/>
         </p:nvPicPr>
         <p:blipFill>
-          <a:blip r:embed="rId2"/>
+          <a:blip r:embed="rId3"/>
           <a:stretch>
             <a:fillRect/>
           </a:stretch>
@@ -8261,14 +8261,14 @@
       </p:sp>
       <p:pic>
         <p:nvPicPr>
-          <p:cNvPr id="6" name="Picture 5" descr="11dafbf4fba9d137.png"/>
+          <p:cNvPr id="6" name="Picture 5" descr="dd41ac289d1eb554.png"/>
           <p:cNvPicPr>
             <a:picLocks noChangeAspect="1"/>
           </p:cNvPicPr>
           <p:nvPr/>
         </p:nvPicPr>
         <p:blipFill>
-          <a:blip r:embed="rId2"/>
+          <a:blip r:embed="rId3"/>
           <a:stretch>
             <a:fillRect/>
           </a:stretch>
